--- a/slides/slice.pptx
+++ b/slides/slice.pptx
@@ -14,6 +14,10 @@
     <p:sldId id="262" r:id="rId8"/>
     <p:sldId id="263" r:id="rId9"/>
     <p:sldId id="264" r:id="rId10"/>
+    <p:sldId id="265" r:id="rId11"/>
+    <p:sldId id="268" r:id="rId12"/>
+    <p:sldId id="266" r:id="rId13"/>
+    <p:sldId id="267" r:id="rId14"/>
   </p:sldIdLst>
   <p:sldSz cx="12192000" cy="6858000"/>
   <p:notesSz cx="6858000" cy="9144000"/>
@@ -3017,6 +3021,262 @@
       </p:par>
     </p:tnLst>
   </p:timing>
+</p:sld>
+</file>
+
+<file path=ppt/slides/slide10.xml><?xml version="1.0" encoding="utf-8"?>
+<p:sld xmlns:a="http://schemas.openxmlformats.org/drawingml/2006/main" xmlns:r="http://schemas.openxmlformats.org/officeDocument/2006/relationships" xmlns:p="http://schemas.openxmlformats.org/presentationml/2006/main">
+  <p:cSld>
+    <p:spTree>
+      <p:nvGrpSpPr>
+        <p:cNvPr id="1" name=""/>
+        <p:cNvGrpSpPr/>
+        <p:nvPr/>
+      </p:nvGrpSpPr>
+      <p:grpSpPr>
+        <a:xfrm>
+          <a:off x="0" y="0"/>
+          <a:ext cx="0" cy="0"/>
+          <a:chOff x="0" y="0"/>
+          <a:chExt cx="0" cy="0"/>
+        </a:xfrm>
+      </p:grpSpPr>
+      <p:sp>
+        <p:nvSpPr>
+          <p:cNvPr id="2" name="Título 1"/>
+          <p:cNvSpPr>
+            <a:spLocks noGrp="1"/>
+          </p:cNvSpPr>
+          <p:nvPr>
+            <p:ph type="title"/>
+          </p:nvPr>
+        </p:nvSpPr>
+        <p:spPr/>
+        <p:txBody>
+          <a:bodyPr/>
+          <a:lstStyle/>
+          <a:p>
+            <a:r>
+              <a:rPr lang="pt-BR" dirty="0" smtClean="0"/>
+              <a:t>Exercícios</a:t>
+            </a:r>
+            <a:endParaRPr lang="pt-BR" dirty="0"/>
+          </a:p>
+        </p:txBody>
+      </p:sp>
+      <p:sp>
+        <p:nvSpPr>
+          <p:cNvPr id="3" name="Espaço Reservado para Conteúdo 2"/>
+          <p:cNvSpPr>
+            <a:spLocks noGrp="1"/>
+          </p:cNvSpPr>
+          <p:nvPr>
+            <p:ph idx="1"/>
+          </p:nvPr>
+        </p:nvSpPr>
+        <p:spPr/>
+        <p:txBody>
+          <a:bodyPr/>
+          <a:lstStyle/>
+          <a:p>
+            <a:endParaRPr lang="pt-BR" dirty="0"/>
+          </a:p>
+        </p:txBody>
+      </p:sp>
+    </p:spTree>
+    <p:extLst>
+      <p:ext uri="{BB962C8B-B14F-4D97-AF65-F5344CB8AC3E}">
+        <p14:creationId xmlns:p14="http://schemas.microsoft.com/office/powerpoint/2010/main" val="4286566442"/>
+      </p:ext>
+    </p:extLst>
+  </p:cSld>
+  <p:clrMapOvr>
+    <a:masterClrMapping/>
+  </p:clrMapOvr>
+</p:sld>
+</file>
+
+<file path=ppt/slides/slide11.xml><?xml version="1.0" encoding="utf-8"?>
+<p:sld xmlns:a="http://schemas.openxmlformats.org/drawingml/2006/main" xmlns:r="http://schemas.openxmlformats.org/officeDocument/2006/relationships" xmlns:p="http://schemas.openxmlformats.org/presentationml/2006/main">
+  <p:cSld>
+    <p:spTree>
+      <p:nvGrpSpPr>
+        <p:cNvPr id="1" name=""/>
+        <p:cNvGrpSpPr/>
+        <p:nvPr/>
+      </p:nvGrpSpPr>
+      <p:grpSpPr>
+        <a:xfrm>
+          <a:off x="0" y="0"/>
+          <a:ext cx="0" cy="0"/>
+          <a:chOff x="0" y="0"/>
+          <a:chExt cx="0" cy="0"/>
+        </a:xfrm>
+      </p:grpSpPr>
+      <p:sp>
+        <p:nvSpPr>
+          <p:cNvPr id="2" name="Título 1"/>
+          <p:cNvSpPr>
+            <a:spLocks noGrp="1"/>
+          </p:cNvSpPr>
+          <p:nvPr>
+            <p:ph type="title"/>
+          </p:nvPr>
+        </p:nvSpPr>
+        <p:spPr/>
+        <p:txBody>
+          <a:bodyPr/>
+          <a:lstStyle/>
+          <a:p>
+            <a:r>
+              <a:rPr lang="pt-BR" dirty="0" smtClean="0"/>
+              <a:t>Projeto Integrador</a:t>
+            </a:r>
+            <a:endParaRPr lang="pt-BR" dirty="0"/>
+          </a:p>
+        </p:txBody>
+      </p:sp>
+      <p:sp>
+        <p:nvSpPr>
+          <p:cNvPr id="3" name="Espaço Reservado para Conteúdo 2"/>
+          <p:cNvSpPr>
+            <a:spLocks noGrp="1"/>
+          </p:cNvSpPr>
+          <p:nvPr>
+            <p:ph idx="1"/>
+          </p:nvPr>
+        </p:nvSpPr>
+        <p:spPr/>
+        <p:txBody>
+          <a:bodyPr/>
+          <a:lstStyle/>
+          <a:p>
+            <a:r>
+              <a:rPr lang="pt-BR" dirty="0" err="1" smtClean="0"/>
+              <a:t>Braimstorm</a:t>
+            </a:r>
+            <a:endParaRPr lang="pt-BR" dirty="0"/>
+          </a:p>
+        </p:txBody>
+      </p:sp>
+      <p:pic>
+        <p:nvPicPr>
+          <p:cNvPr id="4" name="Imagem 3"/>
+          <p:cNvPicPr>
+            <a:picLocks noChangeAspect="1"/>
+          </p:cNvPicPr>
+          <p:nvPr/>
+        </p:nvPicPr>
+        <p:blipFill>
+          <a:blip r:embed="rId2"/>
+          <a:stretch>
+            <a:fillRect/>
+          </a:stretch>
+        </p:blipFill>
+        <p:spPr>
+          <a:xfrm>
+            <a:off x="838200" y="2677756"/>
+            <a:ext cx="4443904" cy="2647076"/>
+          </a:xfrm>
+          <a:prstGeom prst="rect">
+            <a:avLst/>
+          </a:prstGeom>
+        </p:spPr>
+      </p:pic>
+      <p:pic>
+        <p:nvPicPr>
+          <p:cNvPr id="5" name="Imagem 4"/>
+          <p:cNvPicPr>
+            <a:picLocks noChangeAspect="1"/>
+          </p:cNvPicPr>
+          <p:nvPr/>
+        </p:nvPicPr>
+        <p:blipFill>
+          <a:blip r:embed="rId3"/>
+          <a:stretch>
+            <a:fillRect/>
+          </a:stretch>
+        </p:blipFill>
+        <p:spPr>
+          <a:xfrm>
+            <a:off x="5560196" y="2677756"/>
+            <a:ext cx="3990975" cy="1219200"/>
+          </a:xfrm>
+          <a:prstGeom prst="rect">
+            <a:avLst/>
+          </a:prstGeom>
+        </p:spPr>
+      </p:pic>
+    </p:spTree>
+    <p:extLst>
+      <p:ext uri="{BB962C8B-B14F-4D97-AF65-F5344CB8AC3E}">
+        <p14:creationId xmlns:p14="http://schemas.microsoft.com/office/powerpoint/2010/main" val="3754120042"/>
+      </p:ext>
+    </p:extLst>
+  </p:cSld>
+  <p:clrMapOvr>
+    <a:masterClrMapping/>
+  </p:clrMapOvr>
+</p:sld>
+</file>
+
+<file path=ppt/slides/slide12.xml><?xml version="1.0" encoding="utf-8"?>
+<p:sld xmlns:a="http://schemas.openxmlformats.org/drawingml/2006/main" xmlns:r="http://schemas.openxmlformats.org/officeDocument/2006/relationships" xmlns:p="http://schemas.openxmlformats.org/presentationml/2006/main">
+  <p:cSld>
+    <p:spTree>
+      <p:nvGrpSpPr>
+        <p:cNvPr id="1" name=""/>
+        <p:cNvGrpSpPr/>
+        <p:nvPr/>
+      </p:nvGrpSpPr>
+      <p:grpSpPr>
+        <a:xfrm>
+          <a:off x="0" y="0"/>
+          <a:ext cx="0" cy="0"/>
+          <a:chOff x="0" y="0"/>
+          <a:chExt cx="0" cy="0"/>
+        </a:xfrm>
+      </p:grpSpPr>
+    </p:spTree>
+    <p:extLst>
+      <p:ext uri="{BB962C8B-B14F-4D97-AF65-F5344CB8AC3E}">
+        <p14:creationId xmlns:p14="http://schemas.microsoft.com/office/powerpoint/2010/main" val="2420052725"/>
+      </p:ext>
+    </p:extLst>
+  </p:cSld>
+  <p:clrMapOvr>
+    <a:masterClrMapping/>
+  </p:clrMapOvr>
+</p:sld>
+</file>
+
+<file path=ppt/slides/slide13.xml><?xml version="1.0" encoding="utf-8"?>
+<p:sld xmlns:a="http://schemas.openxmlformats.org/drawingml/2006/main" xmlns:r="http://schemas.openxmlformats.org/officeDocument/2006/relationships" xmlns:p="http://schemas.openxmlformats.org/presentationml/2006/main">
+  <p:cSld>
+    <p:spTree>
+      <p:nvGrpSpPr>
+        <p:cNvPr id="1" name=""/>
+        <p:cNvGrpSpPr/>
+        <p:nvPr/>
+      </p:nvGrpSpPr>
+      <p:grpSpPr>
+        <a:xfrm>
+          <a:off x="0" y="0"/>
+          <a:ext cx="0" cy="0"/>
+          <a:chOff x="0" y="0"/>
+          <a:chExt cx="0" cy="0"/>
+        </a:xfrm>
+      </p:grpSpPr>
+    </p:spTree>
+    <p:extLst>
+      <p:ext uri="{BB962C8B-B14F-4D97-AF65-F5344CB8AC3E}">
+        <p14:creationId xmlns:p14="http://schemas.microsoft.com/office/powerpoint/2010/main" val="3770872025"/>
+      </p:ext>
+    </p:extLst>
+  </p:cSld>
+  <p:clrMapOvr>
+    <a:masterClrMapping/>
+  </p:clrMapOvr>
 </p:sld>
 </file>
 
@@ -3562,8 +3822,32 @@
         </p:blipFill>
         <p:spPr>
           <a:xfrm>
-            <a:off x="838200" y="1481705"/>
-            <a:ext cx="6438900" cy="4800600"/>
+            <a:off x="720754" y="1599151"/>
+            <a:ext cx="3347906" cy="2496072"/>
+          </a:xfrm>
+          <a:prstGeom prst="rect">
+            <a:avLst/>
+          </a:prstGeom>
+        </p:spPr>
+      </p:pic>
+      <p:pic>
+        <p:nvPicPr>
+          <p:cNvPr id="5" name="Imagem 4"/>
+          <p:cNvPicPr>
+            <a:picLocks noChangeAspect="1"/>
+          </p:cNvPicPr>
+          <p:nvPr/>
+        </p:nvPicPr>
+        <p:blipFill>
+          <a:blip r:embed="rId3"/>
+          <a:stretch>
+            <a:fillRect/>
+          </a:stretch>
+        </p:blipFill>
+        <p:spPr>
+          <a:xfrm>
+            <a:off x="5319538" y="1690688"/>
+            <a:ext cx="6260765" cy="4985027"/>
           </a:xfrm>
           <a:prstGeom prst="rect">
             <a:avLst/>
@@ -4009,6 +4293,13 @@
   <p:clrMapOvr>
     <a:masterClrMapping/>
   </p:clrMapOvr>
+  <p:timing>
+    <p:tnLst>
+      <p:par>
+        <p:cTn id="1" dur="indefinite" restart="never" nodeType="tmRoot"/>
+      </p:par>
+    </p:tnLst>
+  </p:timing>
 </p:sld>
 </file>
 

--- a/slides/slice.pptx
+++ b/slides/slice.pptx
@@ -17,7 +17,7 @@
     <p:sldId id="265" r:id="rId11"/>
     <p:sldId id="268" r:id="rId12"/>
     <p:sldId id="266" r:id="rId13"/>
-    <p:sldId id="267" r:id="rId14"/>
+    <p:sldId id="269" r:id="rId14"/>
   </p:sldIdLst>
   <p:sldSz cx="12192000" cy="6858000"/>
   <p:notesSz cx="6858000" cy="9144000"/>
@@ -255,7 +255,7 @@
           <a:p>
             <a:fld id="{EF87806D-6ED7-47EC-86EA-8E228D33A99B}" type="datetimeFigureOut">
               <a:rPr lang="pt-BR" smtClean="0"/>
-              <a:t>08/12/2025</a:t>
+              <a:t>09/12/2025</a:t>
             </a:fld>
             <a:endParaRPr lang="pt-BR"/>
           </a:p>
@@ -425,7 +425,7 @@
           <a:p>
             <a:fld id="{EF87806D-6ED7-47EC-86EA-8E228D33A99B}" type="datetimeFigureOut">
               <a:rPr lang="pt-BR" smtClean="0"/>
-              <a:t>08/12/2025</a:t>
+              <a:t>09/12/2025</a:t>
             </a:fld>
             <a:endParaRPr lang="pt-BR"/>
           </a:p>
@@ -605,7 +605,7 @@
           <a:p>
             <a:fld id="{EF87806D-6ED7-47EC-86EA-8E228D33A99B}" type="datetimeFigureOut">
               <a:rPr lang="pt-BR" smtClean="0"/>
-              <a:t>08/12/2025</a:t>
+              <a:t>09/12/2025</a:t>
             </a:fld>
             <a:endParaRPr lang="pt-BR"/>
           </a:p>
@@ -775,7 +775,7 @@
           <a:p>
             <a:fld id="{EF87806D-6ED7-47EC-86EA-8E228D33A99B}" type="datetimeFigureOut">
               <a:rPr lang="pt-BR" smtClean="0"/>
-              <a:t>08/12/2025</a:t>
+              <a:t>09/12/2025</a:t>
             </a:fld>
             <a:endParaRPr lang="pt-BR"/>
           </a:p>
@@ -1021,7 +1021,7 @@
           <a:p>
             <a:fld id="{EF87806D-6ED7-47EC-86EA-8E228D33A99B}" type="datetimeFigureOut">
               <a:rPr lang="pt-BR" smtClean="0"/>
-              <a:t>08/12/2025</a:t>
+              <a:t>09/12/2025</a:t>
             </a:fld>
             <a:endParaRPr lang="pt-BR"/>
           </a:p>
@@ -1253,7 +1253,7 @@
           <a:p>
             <a:fld id="{EF87806D-6ED7-47EC-86EA-8E228D33A99B}" type="datetimeFigureOut">
               <a:rPr lang="pt-BR" smtClean="0"/>
-              <a:t>08/12/2025</a:t>
+              <a:t>09/12/2025</a:t>
             </a:fld>
             <a:endParaRPr lang="pt-BR"/>
           </a:p>
@@ -1620,7 +1620,7 @@
           <a:p>
             <a:fld id="{EF87806D-6ED7-47EC-86EA-8E228D33A99B}" type="datetimeFigureOut">
               <a:rPr lang="pt-BR" smtClean="0"/>
-              <a:t>08/12/2025</a:t>
+              <a:t>09/12/2025</a:t>
             </a:fld>
             <a:endParaRPr lang="pt-BR"/>
           </a:p>
@@ -1738,7 +1738,7 @@
           <a:p>
             <a:fld id="{EF87806D-6ED7-47EC-86EA-8E228D33A99B}" type="datetimeFigureOut">
               <a:rPr lang="pt-BR" smtClean="0"/>
-              <a:t>08/12/2025</a:t>
+              <a:t>09/12/2025</a:t>
             </a:fld>
             <a:endParaRPr lang="pt-BR"/>
           </a:p>
@@ -1833,7 +1833,7 @@
           <a:p>
             <a:fld id="{EF87806D-6ED7-47EC-86EA-8E228D33A99B}" type="datetimeFigureOut">
               <a:rPr lang="pt-BR" smtClean="0"/>
-              <a:t>08/12/2025</a:t>
+              <a:t>09/12/2025</a:t>
             </a:fld>
             <a:endParaRPr lang="pt-BR"/>
           </a:p>
@@ -2110,7 +2110,7 @@
           <a:p>
             <a:fld id="{EF87806D-6ED7-47EC-86EA-8E228D33A99B}" type="datetimeFigureOut">
               <a:rPr lang="pt-BR" smtClean="0"/>
-              <a:t>08/12/2025</a:t>
+              <a:t>09/12/2025</a:t>
             </a:fld>
             <a:endParaRPr lang="pt-BR"/>
           </a:p>
@@ -2363,7 +2363,7 @@
           <a:p>
             <a:fld id="{EF87806D-6ED7-47EC-86EA-8E228D33A99B}" type="datetimeFigureOut">
               <a:rPr lang="pt-BR" smtClean="0"/>
-              <a:t>08/12/2025</a:t>
+              <a:t>09/12/2025</a:t>
             </a:fld>
             <a:endParaRPr lang="pt-BR"/>
           </a:p>
@@ -2576,7 +2576,7 @@
           <a:p>
             <a:fld id="{EF87806D-6ED7-47EC-86EA-8E228D33A99B}" type="datetimeFigureOut">
               <a:rPr lang="pt-BR" smtClean="0"/>
-              <a:t>08/12/2025</a:t>
+              <a:t>09/12/2025</a:t>
             </a:fld>
             <a:endParaRPr lang="pt-BR"/>
           </a:p>
@@ -3093,6 +3093,13 @@
   <p:clrMapOvr>
     <a:masterClrMapping/>
   </p:clrMapOvr>
+  <p:timing>
+    <p:tnLst>
+      <p:par>
+        <p:cTn id="1" dur="indefinite" restart="never" nodeType="tmRoot"/>
+      </p:par>
+    </p:tnLst>
+  </p:timing>
 </p:sld>
 </file>
 
@@ -3217,6 +3224,13 @@
   <p:clrMapOvr>
     <a:masterClrMapping/>
   </p:clrMapOvr>
+  <p:timing>
+    <p:tnLst>
+      <p:par>
+        <p:cTn id="1" dur="indefinite" restart="never" nodeType="tmRoot"/>
+      </p:par>
+    </p:tnLst>
+  </p:timing>
 </p:sld>
 </file>
 
@@ -3237,6 +3251,30 @@
           <a:chExt cx="0" cy="0"/>
         </a:xfrm>
       </p:grpSpPr>
+      <p:pic>
+        <p:nvPicPr>
+          <p:cNvPr id="2" name="Imagem 1"/>
+          <p:cNvPicPr>
+            <a:picLocks noChangeAspect="1"/>
+          </p:cNvPicPr>
+          <p:nvPr/>
+        </p:nvPicPr>
+        <p:blipFill>
+          <a:blip r:embed="rId2"/>
+          <a:stretch>
+            <a:fillRect/>
+          </a:stretch>
+        </p:blipFill>
+        <p:spPr>
+          <a:xfrm>
+            <a:off x="1786855" y="983768"/>
+            <a:ext cx="7727855" cy="4385185"/>
+          </a:xfrm>
+          <a:prstGeom prst="rect">
+            <a:avLst/>
+          </a:prstGeom>
+        </p:spPr>
+      </p:pic>
     </p:spTree>
     <p:extLst>
       <p:ext uri="{BB962C8B-B14F-4D97-AF65-F5344CB8AC3E}">
@@ -3247,6 +3285,13 @@
   <p:clrMapOvr>
     <a:masterClrMapping/>
   </p:clrMapOvr>
+  <p:timing>
+    <p:tnLst>
+      <p:par>
+        <p:cTn id="1" dur="indefinite" restart="never" nodeType="tmRoot"/>
+      </p:par>
+    </p:tnLst>
+  </p:timing>
 </p:sld>
 </file>
 
@@ -3267,16 +3312,177 @@
           <a:chExt cx="0" cy="0"/>
         </a:xfrm>
       </p:grpSpPr>
+      <p:sp>
+        <p:nvSpPr>
+          <p:cNvPr id="2" name="Título 1"/>
+          <p:cNvSpPr>
+            <a:spLocks noGrp="1"/>
+          </p:cNvSpPr>
+          <p:nvPr>
+            <p:ph type="title"/>
+          </p:nvPr>
+        </p:nvSpPr>
+        <p:spPr/>
+        <p:txBody>
+          <a:bodyPr/>
+          <a:lstStyle/>
+          <a:p>
+            <a:r>
+              <a:rPr lang="en-US" dirty="0" err="1" smtClean="0"/>
+              <a:t>Braimstorm</a:t>
+            </a:r>
+            <a:endParaRPr lang="pt-BR" dirty="0"/>
+          </a:p>
+        </p:txBody>
+      </p:sp>
+      <p:sp>
+        <p:nvSpPr>
+          <p:cNvPr id="3" name="Espaço Reservado para Conteúdo 2"/>
+          <p:cNvSpPr>
+            <a:spLocks noGrp="1"/>
+          </p:cNvSpPr>
+          <p:nvPr>
+            <p:ph idx="1"/>
+          </p:nvPr>
+        </p:nvSpPr>
+        <p:spPr/>
+        <p:txBody>
+          <a:bodyPr>
+            <a:normAutofit lnSpcReduction="10000"/>
+          </a:bodyPr>
+          <a:lstStyle/>
+          <a:p>
+            <a:r>
+              <a:rPr lang="en-US" dirty="0" smtClean="0"/>
+              <a:t>Feira dos </a:t>
+            </a:r>
+            <a:r>
+              <a:rPr lang="en-US" dirty="0" err="1" smtClean="0"/>
+              <a:t>Goianos</a:t>
+            </a:r>
+            <a:r>
+              <a:rPr lang="en-US" dirty="0" smtClean="0"/>
+              <a:t> </a:t>
+            </a:r>
+          </a:p>
+          <a:p>
+            <a:pPr lvl="1"/>
+            <a:r>
+              <a:rPr lang="en-US" dirty="0" smtClean="0"/>
+              <a:t>Banca e Banca….</a:t>
+            </a:r>
+          </a:p>
+          <a:p>
+            <a:r>
+              <a:rPr lang="en-US" dirty="0" err="1" smtClean="0"/>
+              <a:t>Setor</a:t>
+            </a:r>
+            <a:r>
+              <a:rPr lang="en-US" dirty="0" smtClean="0"/>
+              <a:t> H Norte</a:t>
+            </a:r>
+          </a:p>
+          <a:p>
+            <a:pPr lvl="1"/>
+            <a:r>
+              <a:rPr lang="en-US" dirty="0" err="1" smtClean="0"/>
+              <a:t>Mecanicos</a:t>
+            </a:r>
+            <a:endParaRPr lang="en-US" dirty="0" smtClean="0"/>
+          </a:p>
+          <a:p>
+            <a:pPr lvl="1"/>
+            <a:r>
+              <a:rPr lang="en-US" dirty="0" smtClean="0"/>
+              <a:t>Site</a:t>
+            </a:r>
+          </a:p>
+          <a:p>
+            <a:pPr lvl="1"/>
+            <a:r>
+              <a:rPr lang="en-US" dirty="0" err="1" smtClean="0"/>
+              <a:t>Pecas</a:t>
+            </a:r>
+            <a:r>
+              <a:rPr lang="en-US" dirty="0" smtClean="0"/>
+              <a:t> </a:t>
+            </a:r>
+          </a:p>
+          <a:p>
+            <a:r>
+              <a:rPr lang="en-US" dirty="0" err="1" smtClean="0"/>
+              <a:t>Marmitas</a:t>
+            </a:r>
+            <a:endParaRPr lang="en-US" dirty="0" smtClean="0"/>
+          </a:p>
+          <a:p>
+            <a:pPr lvl="1"/>
+            <a:r>
+              <a:rPr lang="en-US" dirty="0" smtClean="0"/>
+              <a:t>Sistema de </a:t>
+            </a:r>
+            <a:r>
+              <a:rPr lang="en-US" dirty="0" err="1" smtClean="0"/>
+              <a:t>Nutricao</a:t>
+            </a:r>
+            <a:r>
+              <a:rPr lang="en-US" dirty="0" smtClean="0"/>
+              <a:t> e </a:t>
+            </a:r>
+            <a:r>
+              <a:rPr lang="en-US" dirty="0" err="1" smtClean="0"/>
+              <a:t>Marmitas</a:t>
+            </a:r>
+            <a:r>
+              <a:rPr lang="en-US" dirty="0" smtClean="0"/>
+              <a:t>…</a:t>
+            </a:r>
+          </a:p>
+          <a:p>
+            <a:pPr lvl="1"/>
+            <a:r>
+              <a:rPr lang="en-US" dirty="0" err="1" smtClean="0"/>
+              <a:t>Congelada</a:t>
+            </a:r>
+            <a:r>
+              <a:rPr lang="en-US" dirty="0" smtClean="0"/>
+              <a:t>…</a:t>
+            </a:r>
+          </a:p>
+          <a:p>
+            <a:r>
+              <a:rPr lang="en-US" dirty="0" err="1" smtClean="0"/>
+              <a:t>Barbearia</a:t>
+            </a:r>
+            <a:endParaRPr lang="en-US" dirty="0" smtClean="0"/>
+          </a:p>
+          <a:p>
+            <a:pPr lvl="1"/>
+            <a:r>
+              <a:rPr lang="en-US" smtClean="0"/>
+              <a:t>Fidelidade</a:t>
+            </a:r>
+            <a:endParaRPr lang="pt-BR" dirty="0"/>
+          </a:p>
+        </p:txBody>
+      </p:sp>
     </p:spTree>
     <p:extLst>
       <p:ext uri="{BB962C8B-B14F-4D97-AF65-F5344CB8AC3E}">
-        <p14:creationId xmlns:p14="http://schemas.microsoft.com/office/powerpoint/2010/main" val="3770872025"/>
+        <p14:creationId xmlns:p14="http://schemas.microsoft.com/office/powerpoint/2010/main" val="3208963418"/>
       </p:ext>
     </p:extLst>
   </p:cSld>
   <p:clrMapOvr>
     <a:masterClrMapping/>
   </p:clrMapOvr>
+  <p:timing>
+    <p:tnLst>
+      <p:par>
+        <p:cTn id="1" dur="indefinite" restart="never" nodeType="tmRoot"/>
+      </p:par>
+    </p:tnLst>
+  </p:timing>
 </p:sld>
 </file>
 

--- a/slides/slice.pptx
+++ b/slides/slice.pptx
@@ -18,6 +18,11 @@
     <p:sldId id="268" r:id="rId12"/>
     <p:sldId id="266" r:id="rId13"/>
     <p:sldId id="269" r:id="rId14"/>
+    <p:sldId id="270" r:id="rId15"/>
+    <p:sldId id="271" r:id="rId16"/>
+    <p:sldId id="273" r:id="rId17"/>
+    <p:sldId id="272" r:id="rId18"/>
+    <p:sldId id="274" r:id="rId19"/>
   </p:sldIdLst>
   <p:sldSz cx="12192000" cy="6858000"/>
   <p:notesSz cx="6858000" cy="9144000"/>
@@ -255,7 +260,7 @@
           <a:p>
             <a:fld id="{EF87806D-6ED7-47EC-86EA-8E228D33A99B}" type="datetimeFigureOut">
               <a:rPr lang="pt-BR" smtClean="0"/>
-              <a:t>09/12/2025</a:t>
+              <a:t>10/12/2025</a:t>
             </a:fld>
             <a:endParaRPr lang="pt-BR"/>
           </a:p>
@@ -425,7 +430,7 @@
           <a:p>
             <a:fld id="{EF87806D-6ED7-47EC-86EA-8E228D33A99B}" type="datetimeFigureOut">
               <a:rPr lang="pt-BR" smtClean="0"/>
-              <a:t>09/12/2025</a:t>
+              <a:t>10/12/2025</a:t>
             </a:fld>
             <a:endParaRPr lang="pt-BR"/>
           </a:p>
@@ -605,7 +610,7 @@
           <a:p>
             <a:fld id="{EF87806D-6ED7-47EC-86EA-8E228D33A99B}" type="datetimeFigureOut">
               <a:rPr lang="pt-BR" smtClean="0"/>
-              <a:t>09/12/2025</a:t>
+              <a:t>10/12/2025</a:t>
             </a:fld>
             <a:endParaRPr lang="pt-BR"/>
           </a:p>
@@ -775,7 +780,7 @@
           <a:p>
             <a:fld id="{EF87806D-6ED7-47EC-86EA-8E228D33A99B}" type="datetimeFigureOut">
               <a:rPr lang="pt-BR" smtClean="0"/>
-              <a:t>09/12/2025</a:t>
+              <a:t>10/12/2025</a:t>
             </a:fld>
             <a:endParaRPr lang="pt-BR"/>
           </a:p>
@@ -1021,7 +1026,7 @@
           <a:p>
             <a:fld id="{EF87806D-6ED7-47EC-86EA-8E228D33A99B}" type="datetimeFigureOut">
               <a:rPr lang="pt-BR" smtClean="0"/>
-              <a:t>09/12/2025</a:t>
+              <a:t>10/12/2025</a:t>
             </a:fld>
             <a:endParaRPr lang="pt-BR"/>
           </a:p>
@@ -1253,7 +1258,7 @@
           <a:p>
             <a:fld id="{EF87806D-6ED7-47EC-86EA-8E228D33A99B}" type="datetimeFigureOut">
               <a:rPr lang="pt-BR" smtClean="0"/>
-              <a:t>09/12/2025</a:t>
+              <a:t>10/12/2025</a:t>
             </a:fld>
             <a:endParaRPr lang="pt-BR"/>
           </a:p>
@@ -1620,7 +1625,7 @@
           <a:p>
             <a:fld id="{EF87806D-6ED7-47EC-86EA-8E228D33A99B}" type="datetimeFigureOut">
               <a:rPr lang="pt-BR" smtClean="0"/>
-              <a:t>09/12/2025</a:t>
+              <a:t>10/12/2025</a:t>
             </a:fld>
             <a:endParaRPr lang="pt-BR"/>
           </a:p>
@@ -1738,7 +1743,7 @@
           <a:p>
             <a:fld id="{EF87806D-6ED7-47EC-86EA-8E228D33A99B}" type="datetimeFigureOut">
               <a:rPr lang="pt-BR" smtClean="0"/>
-              <a:t>09/12/2025</a:t>
+              <a:t>10/12/2025</a:t>
             </a:fld>
             <a:endParaRPr lang="pt-BR"/>
           </a:p>
@@ -1833,7 +1838,7 @@
           <a:p>
             <a:fld id="{EF87806D-6ED7-47EC-86EA-8E228D33A99B}" type="datetimeFigureOut">
               <a:rPr lang="pt-BR" smtClean="0"/>
-              <a:t>09/12/2025</a:t>
+              <a:t>10/12/2025</a:t>
             </a:fld>
             <a:endParaRPr lang="pt-BR"/>
           </a:p>
@@ -2110,7 +2115,7 @@
           <a:p>
             <a:fld id="{EF87806D-6ED7-47EC-86EA-8E228D33A99B}" type="datetimeFigureOut">
               <a:rPr lang="pt-BR" smtClean="0"/>
-              <a:t>09/12/2025</a:t>
+              <a:t>10/12/2025</a:t>
             </a:fld>
             <a:endParaRPr lang="pt-BR"/>
           </a:p>
@@ -2363,7 +2368,7 @@
           <a:p>
             <a:fld id="{EF87806D-6ED7-47EC-86EA-8E228D33A99B}" type="datetimeFigureOut">
               <a:rPr lang="pt-BR" smtClean="0"/>
-              <a:t>09/12/2025</a:t>
+              <a:t>10/12/2025</a:t>
             </a:fld>
             <a:endParaRPr lang="pt-BR"/>
           </a:p>
@@ -2576,7 +2581,7 @@
           <a:p>
             <a:fld id="{EF87806D-6ED7-47EC-86EA-8E228D33A99B}" type="datetimeFigureOut">
               <a:rPr lang="pt-BR" smtClean="0"/>
-              <a:t>09/12/2025</a:t>
+              <a:t>10/12/2025</a:t>
             </a:fld>
             <a:endParaRPr lang="pt-BR"/>
           </a:p>
@@ -3486,6 +3491,428 @@
 </p:sld>
 </file>
 
+<file path=ppt/slides/slide14.xml><?xml version="1.0" encoding="utf-8"?>
+<p:sld xmlns:a="http://schemas.openxmlformats.org/drawingml/2006/main" xmlns:r="http://schemas.openxmlformats.org/officeDocument/2006/relationships" xmlns:p="http://schemas.openxmlformats.org/presentationml/2006/main">
+  <p:cSld>
+    <p:spTree>
+      <p:nvGrpSpPr>
+        <p:cNvPr id="1" name=""/>
+        <p:cNvGrpSpPr/>
+        <p:nvPr/>
+      </p:nvGrpSpPr>
+      <p:grpSpPr>
+        <a:xfrm>
+          <a:off x="0" y="0"/>
+          <a:ext cx="0" cy="0"/>
+          <a:chOff x="0" y="0"/>
+          <a:chExt cx="0" cy="0"/>
+        </a:xfrm>
+      </p:grpSpPr>
+      <p:sp>
+        <p:nvSpPr>
+          <p:cNvPr id="2" name="Título 1"/>
+          <p:cNvSpPr>
+            <a:spLocks noGrp="1"/>
+          </p:cNvSpPr>
+          <p:nvPr>
+            <p:ph type="title"/>
+          </p:nvPr>
+        </p:nvSpPr>
+        <p:spPr>
+          <a:xfrm>
+            <a:off x="846589" y="-196937"/>
+            <a:ext cx="10515600" cy="1325563"/>
+          </a:xfrm>
+        </p:spPr>
+        <p:txBody>
+          <a:bodyPr/>
+          <a:lstStyle/>
+          <a:p>
+            <a:r>
+              <a:rPr lang="pt-BR" dirty="0" smtClean="0"/>
+              <a:t>Probabilidade</a:t>
+            </a:r>
+            <a:endParaRPr lang="pt-BR" dirty="0"/>
+          </a:p>
+        </p:txBody>
+      </p:sp>
+      <p:pic>
+        <p:nvPicPr>
+          <p:cNvPr id="8" name="Imagem 7"/>
+          <p:cNvPicPr>
+            <a:picLocks noChangeAspect="1"/>
+          </p:cNvPicPr>
+          <p:nvPr/>
+        </p:nvPicPr>
+        <p:blipFill>
+          <a:blip r:embed="rId2"/>
+          <a:stretch>
+            <a:fillRect/>
+          </a:stretch>
+        </p:blipFill>
+        <p:spPr>
+          <a:xfrm>
+            <a:off x="958616" y="716427"/>
+            <a:ext cx="6619875" cy="1666875"/>
+          </a:xfrm>
+          <a:prstGeom prst="rect">
+            <a:avLst/>
+          </a:prstGeom>
+        </p:spPr>
+      </p:pic>
+      <p:pic>
+        <p:nvPicPr>
+          <p:cNvPr id="9" name="Imagem 8"/>
+          <p:cNvPicPr>
+            <a:picLocks noChangeAspect="1"/>
+          </p:cNvPicPr>
+          <p:nvPr/>
+        </p:nvPicPr>
+        <p:blipFill>
+          <a:blip r:embed="rId3"/>
+          <a:stretch>
+            <a:fillRect/>
+          </a:stretch>
+        </p:blipFill>
+        <p:spPr>
+          <a:xfrm>
+            <a:off x="958616" y="2442772"/>
+            <a:ext cx="7400925" cy="1085850"/>
+          </a:xfrm>
+          <a:prstGeom prst="rect">
+            <a:avLst/>
+          </a:prstGeom>
+        </p:spPr>
+      </p:pic>
+      <p:pic>
+        <p:nvPicPr>
+          <p:cNvPr id="10" name="Imagem 9"/>
+          <p:cNvPicPr>
+            <a:picLocks noChangeAspect="1"/>
+          </p:cNvPicPr>
+          <p:nvPr/>
+        </p:nvPicPr>
+        <p:blipFill>
+          <a:blip r:embed="rId4"/>
+          <a:stretch>
+            <a:fillRect/>
+          </a:stretch>
+        </p:blipFill>
+        <p:spPr>
+          <a:xfrm>
+            <a:off x="958616" y="3588092"/>
+            <a:ext cx="6572250" cy="1676400"/>
+          </a:xfrm>
+          <a:prstGeom prst="rect">
+            <a:avLst/>
+          </a:prstGeom>
+        </p:spPr>
+      </p:pic>
+      <p:pic>
+        <p:nvPicPr>
+          <p:cNvPr id="11" name="Imagem 10"/>
+          <p:cNvPicPr>
+            <a:picLocks noChangeAspect="1"/>
+          </p:cNvPicPr>
+          <p:nvPr/>
+        </p:nvPicPr>
+        <p:blipFill>
+          <a:blip r:embed="rId5"/>
+          <a:stretch>
+            <a:fillRect/>
+          </a:stretch>
+        </p:blipFill>
+        <p:spPr>
+          <a:xfrm>
+            <a:off x="958616" y="5264492"/>
+            <a:ext cx="7048500" cy="1428750"/>
+          </a:xfrm>
+          <a:prstGeom prst="rect">
+            <a:avLst/>
+          </a:prstGeom>
+        </p:spPr>
+      </p:pic>
+    </p:spTree>
+    <p:extLst>
+      <p:ext uri="{BB962C8B-B14F-4D97-AF65-F5344CB8AC3E}">
+        <p14:creationId xmlns:p14="http://schemas.microsoft.com/office/powerpoint/2010/main" val="2619060882"/>
+      </p:ext>
+    </p:extLst>
+  </p:cSld>
+  <p:clrMapOvr>
+    <a:masterClrMapping/>
+  </p:clrMapOvr>
+  <p:timing>
+    <p:tnLst>
+      <p:par>
+        <p:cTn id="1" dur="indefinite" restart="never" nodeType="tmRoot"/>
+      </p:par>
+    </p:tnLst>
+  </p:timing>
+</p:sld>
+</file>
+
+<file path=ppt/slides/slide15.xml><?xml version="1.0" encoding="utf-8"?>
+<p:sld xmlns:a="http://schemas.openxmlformats.org/drawingml/2006/main" xmlns:r="http://schemas.openxmlformats.org/officeDocument/2006/relationships" xmlns:p="http://schemas.openxmlformats.org/presentationml/2006/main">
+  <p:cSld>
+    <p:spTree>
+      <p:nvGrpSpPr>
+        <p:cNvPr id="1" name=""/>
+        <p:cNvGrpSpPr/>
+        <p:nvPr/>
+      </p:nvGrpSpPr>
+      <p:grpSpPr>
+        <a:xfrm>
+          <a:off x="0" y="0"/>
+          <a:ext cx="0" cy="0"/>
+          <a:chOff x="0" y="0"/>
+          <a:chExt cx="0" cy="0"/>
+        </a:xfrm>
+      </p:grpSpPr>
+      <p:pic>
+        <p:nvPicPr>
+          <p:cNvPr id="2" name="Imagem 1"/>
+          <p:cNvPicPr>
+            <a:picLocks noChangeAspect="1"/>
+          </p:cNvPicPr>
+          <p:nvPr/>
+        </p:nvPicPr>
+        <p:blipFill>
+          <a:blip r:embed="rId2"/>
+          <a:stretch>
+            <a:fillRect/>
+          </a:stretch>
+        </p:blipFill>
+        <p:spPr>
+          <a:xfrm>
+            <a:off x="111095" y="488887"/>
+            <a:ext cx="11822214" cy="411491"/>
+          </a:xfrm>
+          <a:prstGeom prst="rect">
+            <a:avLst/>
+          </a:prstGeom>
+        </p:spPr>
+      </p:pic>
+      <p:pic>
+        <p:nvPicPr>
+          <p:cNvPr id="3" name="Imagem 2"/>
+          <p:cNvPicPr>
+            <a:picLocks noChangeAspect="1"/>
+          </p:cNvPicPr>
+          <p:nvPr/>
+        </p:nvPicPr>
+        <p:blipFill>
+          <a:blip r:embed="rId3"/>
+          <a:stretch>
+            <a:fillRect/>
+          </a:stretch>
+        </p:blipFill>
+        <p:spPr>
+          <a:xfrm>
+            <a:off x="111095" y="1001828"/>
+            <a:ext cx="7696200" cy="2085975"/>
+          </a:xfrm>
+          <a:prstGeom prst="rect">
+            <a:avLst/>
+          </a:prstGeom>
+        </p:spPr>
+      </p:pic>
+    </p:spTree>
+    <p:extLst>
+      <p:ext uri="{BB962C8B-B14F-4D97-AF65-F5344CB8AC3E}">
+        <p14:creationId xmlns:p14="http://schemas.microsoft.com/office/powerpoint/2010/main" val="3092724326"/>
+      </p:ext>
+    </p:extLst>
+  </p:cSld>
+  <p:clrMapOvr>
+    <a:masterClrMapping/>
+  </p:clrMapOvr>
+  <p:timing>
+    <p:tnLst>
+      <p:par>
+        <p:cTn id="1" dur="indefinite" restart="never" nodeType="tmRoot"/>
+      </p:par>
+    </p:tnLst>
+  </p:timing>
+</p:sld>
+</file>
+
+<file path=ppt/slides/slide16.xml><?xml version="1.0" encoding="utf-8"?>
+<p:sld xmlns:a="http://schemas.openxmlformats.org/drawingml/2006/main" xmlns:r="http://schemas.openxmlformats.org/officeDocument/2006/relationships" xmlns:p="http://schemas.openxmlformats.org/presentationml/2006/main">
+  <p:cSld>
+    <p:spTree>
+      <p:nvGrpSpPr>
+        <p:cNvPr id="1" name=""/>
+        <p:cNvGrpSpPr/>
+        <p:nvPr/>
+      </p:nvGrpSpPr>
+      <p:grpSpPr>
+        <a:xfrm>
+          <a:off x="0" y="0"/>
+          <a:ext cx="0" cy="0"/>
+          <a:chOff x="0" y="0"/>
+          <a:chExt cx="0" cy="0"/>
+        </a:xfrm>
+      </p:grpSpPr>
+      <p:pic>
+        <p:nvPicPr>
+          <p:cNvPr id="2" name="Imagem 1"/>
+          <p:cNvPicPr>
+            <a:picLocks noChangeAspect="1"/>
+          </p:cNvPicPr>
+          <p:nvPr/>
+        </p:nvPicPr>
+        <p:blipFill>
+          <a:blip r:embed="rId2"/>
+          <a:stretch>
+            <a:fillRect/>
+          </a:stretch>
+        </p:blipFill>
+        <p:spPr>
+          <a:xfrm>
+            <a:off x="214624" y="3053593"/>
+            <a:ext cx="11828474" cy="755009"/>
+          </a:xfrm>
+          <a:prstGeom prst="rect">
+            <a:avLst/>
+          </a:prstGeom>
+        </p:spPr>
+      </p:pic>
+    </p:spTree>
+    <p:extLst>
+      <p:ext uri="{BB962C8B-B14F-4D97-AF65-F5344CB8AC3E}">
+        <p14:creationId xmlns:p14="http://schemas.microsoft.com/office/powerpoint/2010/main" val="1777481531"/>
+      </p:ext>
+    </p:extLst>
+  </p:cSld>
+  <p:clrMapOvr>
+    <a:masterClrMapping/>
+  </p:clrMapOvr>
+  <p:timing>
+    <p:tnLst>
+      <p:par>
+        <p:cTn id="1" dur="indefinite" restart="never" nodeType="tmRoot"/>
+      </p:par>
+    </p:tnLst>
+  </p:timing>
+</p:sld>
+</file>
+
+<file path=ppt/slides/slide17.xml><?xml version="1.0" encoding="utf-8"?>
+<p:sld xmlns:a="http://schemas.openxmlformats.org/drawingml/2006/main" xmlns:r="http://schemas.openxmlformats.org/officeDocument/2006/relationships" xmlns:p="http://schemas.openxmlformats.org/presentationml/2006/main">
+  <p:cSld>
+    <p:spTree>
+      <p:nvGrpSpPr>
+        <p:cNvPr id="1" name=""/>
+        <p:cNvGrpSpPr/>
+        <p:nvPr/>
+      </p:nvGrpSpPr>
+      <p:grpSpPr>
+        <a:xfrm>
+          <a:off x="0" y="0"/>
+          <a:ext cx="0" cy="0"/>
+          <a:chOff x="0" y="0"/>
+          <a:chExt cx="0" cy="0"/>
+        </a:xfrm>
+      </p:grpSpPr>
+      <p:pic>
+        <p:nvPicPr>
+          <p:cNvPr id="2" name="Imagem 1"/>
+          <p:cNvPicPr>
+            <a:picLocks noChangeAspect="1"/>
+          </p:cNvPicPr>
+          <p:nvPr/>
+        </p:nvPicPr>
+        <p:blipFill>
+          <a:blip r:embed="rId2"/>
+          <a:stretch>
+            <a:fillRect/>
+          </a:stretch>
+        </p:blipFill>
+        <p:spPr>
+          <a:xfrm>
+            <a:off x="75501" y="2649281"/>
+            <a:ext cx="11926778" cy="1494880"/>
+          </a:xfrm>
+          <a:prstGeom prst="rect">
+            <a:avLst/>
+          </a:prstGeom>
+        </p:spPr>
+      </p:pic>
+    </p:spTree>
+    <p:extLst>
+      <p:ext uri="{BB962C8B-B14F-4D97-AF65-F5344CB8AC3E}">
+        <p14:creationId xmlns:p14="http://schemas.microsoft.com/office/powerpoint/2010/main" val="499270981"/>
+      </p:ext>
+    </p:extLst>
+  </p:cSld>
+  <p:clrMapOvr>
+    <a:masterClrMapping/>
+  </p:clrMapOvr>
+  <p:timing>
+    <p:tnLst>
+      <p:par>
+        <p:cTn id="1" dur="indefinite" restart="never" nodeType="tmRoot"/>
+      </p:par>
+    </p:tnLst>
+  </p:timing>
+</p:sld>
+</file>
+
+<file path=ppt/slides/slide18.xml><?xml version="1.0" encoding="utf-8"?>
+<p:sld xmlns:a="http://schemas.openxmlformats.org/drawingml/2006/main" xmlns:r="http://schemas.openxmlformats.org/officeDocument/2006/relationships" xmlns:p="http://schemas.openxmlformats.org/presentationml/2006/main">
+  <p:cSld>
+    <p:spTree>
+      <p:nvGrpSpPr>
+        <p:cNvPr id="1" name=""/>
+        <p:cNvGrpSpPr/>
+        <p:nvPr/>
+      </p:nvGrpSpPr>
+      <p:grpSpPr>
+        <a:xfrm>
+          <a:off x="0" y="0"/>
+          <a:ext cx="0" cy="0"/>
+          <a:chOff x="0" y="0"/>
+          <a:chExt cx="0" cy="0"/>
+        </a:xfrm>
+      </p:grpSpPr>
+      <p:pic>
+        <p:nvPicPr>
+          <p:cNvPr id="2" name="Imagem 1"/>
+          <p:cNvPicPr>
+            <a:picLocks noChangeAspect="1"/>
+          </p:cNvPicPr>
+          <p:nvPr/>
+        </p:nvPicPr>
+        <p:blipFill>
+          <a:blip r:embed="rId2"/>
+          <a:stretch>
+            <a:fillRect/>
+          </a:stretch>
+        </p:blipFill>
+        <p:spPr>
+          <a:xfrm>
+            <a:off x="360727" y="2038477"/>
+            <a:ext cx="11097848" cy="2690686"/>
+          </a:xfrm>
+          <a:prstGeom prst="rect">
+            <a:avLst/>
+          </a:prstGeom>
+        </p:spPr>
+      </p:pic>
+    </p:spTree>
+    <p:extLst>
+      <p:ext uri="{BB962C8B-B14F-4D97-AF65-F5344CB8AC3E}">
+        <p14:creationId xmlns:p14="http://schemas.microsoft.com/office/powerpoint/2010/main" val="1613590892"/>
+      </p:ext>
+    </p:extLst>
+  </p:cSld>
+  <p:clrMapOvr>
+    <a:masterClrMapping/>
+  </p:clrMapOvr>
+</p:sld>
+</file>
+
 <file path=ppt/slides/slide2.xml><?xml version="1.0" encoding="utf-8"?>
 <p:sld xmlns:a="http://schemas.openxmlformats.org/drawingml/2006/main" xmlns:r="http://schemas.openxmlformats.org/officeDocument/2006/relationships" xmlns:p="http://schemas.openxmlformats.org/presentationml/2006/main">
   <p:cSld>
